--- a/docs/deck/sih26153_technical_deck.pptx
+++ b/docs/deck/sih26153_technical_deck.pptx
@@ -660,6 +660,57 @@
           <a:lstStyle/>
           <a:p>
             <a:r>
+              <a:t>**Two lanes, one feature matrix — and the judge's demo is the top lane.** `docs/architecture.md`</a:t>
+            </a:r>
+          </a:p>
+          <a:p>
+            <a:r>
+              <a:t>§2 draws exactly this split: the one 30-feature matrix feeds a deployed lane and an</a:t>
+            </a:r>
+          </a:p>
+          <a:p>
+            <a:r>
+              <a:t>evaluation-only lane, and "none of it runs in the engine" is that document's own phrase for the</a:t>
+            </a:r>
+          </a:p>
+          <a:p>
+            <a:r>
+              <a:t>lower one. `engine/predict.py` loads **one booster** and calls `predict_proba` once; the two</a:t>
+            </a:r>
+          </a:p>
+          <a:p>
+            <a:r>
+              <a:t>variants are chosen by input format (PCAP → all 30 features, CSV → flow-only), not chained. So</a:t>
+            </a:r>
+          </a:p>
+          <a:p>
+            <a:r>
+              <a:t>the chevrons below the dashed caption — TGN, GRAFT, the k-step head, the rank-mean fusion — are</a:t>
+            </a:r>
+          </a:p>
+          <a:p>
+            <a:r>
+              <a:t>how the numbers on slide 3 were *measured*, not what the binary a judge runs *does*. If this</a:t>
+            </a:r>
+          </a:p>
+          <a:p>
+            <a:r>
+              <a:t>slide ever draws them as one chain again, `scripts/build_deck.py` fails the build: the deployed</a:t>
+            </a:r>
+          </a:p>
+          <a:p>
+            <a:r>
+              <a:t>lane must name the deployed model, and every evaluation-only component must be inside the dashed</a:t>
+            </a:r>
+          </a:p>
+          <a:p>
+            <a:r>
+              <a:t>lane and absent from the solid one.</a:t>
+            </a:r>
+          </a:p>
+          <a:p/>
+          <a:p>
+            <a:r>
               <a:t>- **Packet + flow features**: TTL variance, TCP window, fragment flags, payload histogram,</a:t>
             </a:r>
           </a:p>
@@ -864,7 +915,22 @@
           <a:p/>
           <a:p>
             <a:r>
-              <a:t>*And which row the live demo actually is:* the fused row is an **evaluation-side** result.</a:t>
+              <a:t>*And which row the live demo actually is — printed in the table, not left to this page:* the</a:t>
+            </a:r>
+          </a:p>
+          <a:p>
+            <a:r>
+              <a:t>model column carries the lane beside every model, so the fused row reads **EVAL-SIDE** and the</a:t>
+            </a:r>
+          </a:p>
+          <a:p>
+            <a:r>
+              <a:t>XGBoost row reads **DEPLOYED ENGINE** in the largest type on the slide. That is deliberate: the</a:t>
+            </a:r>
+          </a:p>
+          <a:p>
+            <a:r>
+              <a:t>previous revision put 0.933 in 18 pt with the correction only here, in notes nobody projects.</a:t>
             </a:r>
           </a:p>
           <a:p>
@@ -884,7 +950,22 @@
           </a:p>
           <a:p>
             <a:r>
-              <a:t>a judge asks whether the demo is the 0.933 system, the answer is no, and this is where you say so.</a:t>
+              <a:t>a judge asks whether the demo is the 0.933 system, the answer is no, and the slide has already</a:t>
+            </a:r>
+          </a:p>
+          <a:p>
+            <a:r>
+              <a:t>said so. Each figure in the table is bound by `scripts/build_deck.py` to the row of</a:t>
+            </a:r>
+          </a:p>
+          <a:p>
+            <a:r>
+              <a:t>`docs/architecture.md` §4 that measured it, so giving one model another model's AUROC fails the</a:t>
+            </a:r>
+          </a:p>
+          <a:p>
+            <a:r>
+              <a:t>build rather than shipping.</a:t>
             </a:r>
           </a:p>
           <a:p/>
@@ -1410,7 +1491,7 @@
           </a:p>
           <a:p>
             <a:r>
-              <a:t>operating point, the M11 lab capture to obtain the two missing kill-chain stages, engine-side</a:t>
+              <a:t>operating point, the M11 lab capture to obtain the three missing kill-chain stages, engine-side</a:t>
             </a:r>
           </a:p>
           <a:p>
@@ -5229,7 +5310,7 @@
                 </a:solidFill>
                 <a:latin typeface="Segoe UI"/>
               </a:rPr>
-              <a:t>Architecture</a:t>
+              <a:t>Architecture: two lanes, and only one of them ships</a:t>
             </a:r>
           </a:p>
         </p:txBody>
@@ -5304,27 +5385,93 @@
               </a:spcAft>
             </a:pPr>
             <a:r>
+              <a:rPr sz="2300" b="1" i="0">
+                <a:solidFill>
+                  <a:srgbClr val="0E3A5C"/>
+                </a:solidFill>
+                <a:latin typeface="Segoe UI"/>
+              </a:rPr>
+              <a:t>XGBoost</a:t>
+            </a:r>
+            <a:r>
               <a:rPr sz="2300" b="0" i="0">
                 <a:solidFill>
                   <a:srgbClr val="0E3A5C"/>
                 </a:solidFill>
                 <a:latin typeface="Segoe UI"/>
               </a:rPr>
-              <a:t>Causality is enforced, not assumed — and no raw identity reaches the model.</a:t>
-            </a:r>
-          </a:p>
-        </p:txBody>
-      </p:sp>
-      <p:sp>
-        <p:nvSpPr>
-          <p:cNvPr id="6" name="deck-pipe-0-0"/>
+              <a:t> is the model in the scoring path. TGN, GRAFT and the k-step head are evaluation-only.</a:t>
+            </a:r>
+          </a:p>
+        </p:txBody>
+      </p:sp>
+      <p:sp>
+        <p:nvSpPr>
+          <p:cNvPr id="6" name="deck-lane-caption-deployed"/>
+          <p:cNvSpPr txBox="1"/>
+          <p:nvPr/>
+        </p:nvSpPr>
+        <p:spPr>
+          <a:xfrm>
+            <a:off x="566928" y="2102104"/>
+            <a:ext cx="11057839" cy="224028"/>
+          </a:xfrm>
+          <a:prstGeom prst="rect">
+            <a:avLst/>
+          </a:prstGeom>
+          <a:noFill/>
+        </p:spPr>
+        <p:txBody>
+          <a:bodyPr wrap="square" lIns="0" rIns="0" tIns="0" bIns="0">
+            <a:spAutoFit/>
+          </a:bodyPr>
+          <a:lstStyle/>
+          <a:p>
+            <a:pPr>
+              <a:spcAft>
+                <a:spcPts val="0"/>
+              </a:spcAft>
+            </a:pPr>
+            <a:r>
+              <a:rPr sz="1400" b="1" i="0">
+                <a:solidFill>
+                  <a:srgbClr val="0E3A5C"/>
+                </a:solidFill>
+                <a:latin typeface="Segoe UI"/>
+              </a:rPr>
+              <a:t>DEPLOYED — what </a:t>
+            </a:r>
+            <a:r>
+              <a:rPr sz="1400" b="1" i="0">
+                <a:solidFill>
+                  <a:srgbClr val="0E3A5C"/>
+                </a:solidFill>
+                <a:latin typeface="Consolas"/>
+              </a:rPr>
+              <a:t>engine/predict.py</a:t>
+            </a:r>
+            <a:r>
+              <a:rPr sz="1400" b="1" i="0">
+                <a:solidFill>
+                  <a:srgbClr val="0E3A5C"/>
+                </a:solidFill>
+                <a:latin typeface="Segoe UI"/>
+              </a:rPr>
+              <a:t> loads and runs</a:t>
+            </a:r>
+          </a:p>
+        </p:txBody>
+      </p:sp>
+      <p:sp>
+        <p:nvSpPr>
+          <p:cNvPr id="7" name="deck-lane-deployed-0"/>
           <p:cNvSpPr/>
           <p:nvPr/>
         </p:nvSpPr>
         <p:spPr>
           <a:xfrm>
-            <a:off x="566928" y="2102104"/>
-            <a:ext cx="2695879" cy="841248"/>
+            <a:off x="566928" y="2380996"/>
+            <a:ext cx="2138415" cy="841248"/>
           </a:xfrm>
           <a:prstGeom prst="chevron">
             <a:avLst/>
@@ -5370,14 +5517,14 @@
       </p:sp>
       <p:sp>
         <p:nvSpPr>
-          <p:cNvPr id="7" name="deck-pipe-0-1"/>
+          <p:cNvPr id="8" name="deck-lane-deployed-1"/>
           <p:cNvSpPr/>
           <p:nvPr/>
         </p:nvSpPr>
         <p:spPr>
           <a:xfrm>
-            <a:off x="3354247" y="2102104"/>
-            <a:ext cx="2695879" cy="841248"/>
+            <a:off x="2796783" y="2380996"/>
+            <a:ext cx="2138415" cy="841248"/>
           </a:xfrm>
           <a:prstGeom prst="chevron">
             <a:avLst/>
@@ -5425,14 +5572,14 @@
       </p:sp>
       <p:sp>
         <p:nvSpPr>
-          <p:cNvPr id="8" name="deck-pipe-0-2"/>
+          <p:cNvPr id="9" name="deck-lane-deployed-2"/>
           <p:cNvSpPr/>
           <p:nvPr/>
         </p:nvSpPr>
         <p:spPr>
           <a:xfrm>
-            <a:off x="6141567" y="2102104"/>
-            <a:ext cx="2695879" cy="841248"/>
+            <a:off x="5026639" y="2380996"/>
+            <a:ext cx="2138415" cy="841248"/>
           </a:xfrm>
           <a:prstGeom prst="chevron">
             <a:avLst/>
@@ -5480,14 +5627,14 @@
       </p:sp>
       <p:sp>
         <p:nvSpPr>
-          <p:cNvPr id="9" name="deck-pipe-0-3"/>
+          <p:cNvPr id="10" name="deck-lane-deployed-3"/>
           <p:cNvSpPr/>
           <p:nvPr/>
         </p:nvSpPr>
         <p:spPr>
           <a:xfrm>
-            <a:off x="8928887" y="2102104"/>
-            <a:ext cx="2695879" cy="841248"/>
+            <a:off x="7256495" y="2380996"/>
+            <a:ext cx="2138415" cy="841248"/>
           </a:xfrm>
           <a:prstGeom prst="chevron">
             <a:avLst/>
@@ -5522,201 +5669,36 @@
           <a:p>
             <a:pPr algn="ctr"/>
             <a:r>
+              <a:rPr sz="1400" b="1" i="0">
+                <a:solidFill>
+                  <a:srgbClr val="101A28"/>
+                </a:solidFill>
+                <a:latin typeface="Segoe UI"/>
+              </a:rPr>
+              <a:t>XGBoost scorer</a:t>
+            </a:r>
+            <a:r>
               <a:rPr sz="1400" b="0" i="0">
                 <a:solidFill>
                   <a:srgbClr val="101A28"/>
                 </a:solidFill>
                 <a:latin typeface="Segoe UI"/>
               </a:rPr>
-              <a:t>TGN temporal-graph memory</a:t>
-            </a:r>
-          </a:p>
-        </p:txBody>
-      </p:sp>
-      <p:sp>
-        <p:nvSpPr>
-          <p:cNvPr id="10" name="deck-pipe-1-0"/>
+              <a:t> (one booster)</a:t>
+            </a:r>
+          </a:p>
+        </p:txBody>
+      </p:sp>
+      <p:sp>
+        <p:nvSpPr>
+          <p:cNvPr id="11" name="deck-lane-deployed-4"/>
           <p:cNvSpPr/>
           <p:nvPr/>
         </p:nvSpPr>
         <p:spPr>
           <a:xfrm>
-            <a:off x="566928" y="3071368"/>
-            <a:ext cx="2695879" cy="841248"/>
-          </a:xfrm>
-          <a:prstGeom prst="chevron">
-            <a:avLst/>
-          </a:prstGeom>
-          <a:solidFill>
-            <a:srgbClr val="EEF3F8"/>
-          </a:solidFill>
-          <a:ln w="15875">
-            <a:solidFill>
-              <a:srgbClr val="CEDAE6"/>
-            </a:solidFill>
-          </a:ln>
-          <a:effectLst/>
-        </p:spPr>
-        <p:style>
-          <a:lnRef idx="1">
-            <a:schemeClr val="accent1"/>
-          </a:lnRef>
-          <a:fillRef idx="3">
-            <a:schemeClr val="accent1"/>
-          </a:fillRef>
-          <a:effectRef idx="2">
-            <a:schemeClr val="accent1"/>
-          </a:effectRef>
-          <a:fontRef idx="minor">
-            <a:schemeClr val="lt1"/>
-          </a:fontRef>
-        </p:style>
-        <p:txBody>
-          <a:bodyPr rtlCol="0" anchor="ctr" wrap="square" lIns="118872" rIns="118872"/>
-          <a:lstStyle/>
-          <a:p>
-            <a:pPr algn="ctr"/>
-            <a:r>
-              <a:rPr sz="1400" b="0" i="0">
-                <a:solidFill>
-                  <a:srgbClr val="101A28"/>
-                </a:solidFill>
-                <a:latin typeface="Segoe UI"/>
-              </a:rPr>
-              <a:t>causal Transformer (GRAFT)</a:t>
-            </a:r>
-          </a:p>
-        </p:txBody>
-      </p:sp>
-      <p:sp>
-        <p:nvSpPr>
-          <p:cNvPr id="11" name="deck-pipe-1-1"/>
-          <p:cNvSpPr/>
-          <p:nvPr/>
-        </p:nvSpPr>
-        <p:spPr>
-          <a:xfrm>
-            <a:off x="3354247" y="3071368"/>
-            <a:ext cx="2695879" cy="841248"/>
-          </a:xfrm>
-          <a:prstGeom prst="chevron">
-            <a:avLst/>
-          </a:prstGeom>
-          <a:solidFill>
-            <a:srgbClr val="EEF3F8"/>
-          </a:solidFill>
-          <a:ln w="15875">
-            <a:solidFill>
-              <a:srgbClr val="CEDAE6"/>
-            </a:solidFill>
-          </a:ln>
-          <a:effectLst/>
-        </p:spPr>
-        <p:style>
-          <a:lnRef idx="1">
-            <a:schemeClr val="accent1"/>
-          </a:lnRef>
-          <a:fillRef idx="3">
-            <a:schemeClr val="accent1"/>
-          </a:fillRef>
-          <a:effectRef idx="2">
-            <a:schemeClr val="accent1"/>
-          </a:effectRef>
-          <a:fontRef idx="minor">
-            <a:schemeClr val="lt1"/>
-          </a:fontRef>
-        </p:style>
-        <p:txBody>
-          <a:bodyPr rtlCol="0" anchor="ctr" wrap="square" lIns="118872" rIns="118872"/>
-          <a:lstStyle/>
-          <a:p>
-            <a:pPr algn="ctr"/>
-            <a:r>
-              <a:rPr sz="1400" b="0" i="0">
-                <a:solidFill>
-                  <a:srgbClr val="101A28"/>
-                </a:solidFill>
-                <a:latin typeface="Segoe UI"/>
-              </a:rPr>
-              <a:t>forecast head (horizon k): </a:t>
-            </a:r>
-            <a:r>
-              <a:rPr sz="1400" b="1" i="0">
-                <a:solidFill>
-                  <a:srgbClr val="101A28"/>
-                </a:solidFill>
-                <a:latin typeface="Segoe UI"/>
-              </a:rPr>
-              <a:t>ranking only</a:t>
-            </a:r>
-          </a:p>
-        </p:txBody>
-      </p:sp>
-      <p:sp>
-        <p:nvSpPr>
-          <p:cNvPr id="12" name="deck-pipe-1-2"/>
-          <p:cNvSpPr/>
-          <p:nvPr/>
-        </p:nvSpPr>
-        <p:spPr>
-          <a:xfrm>
-            <a:off x="6141567" y="3071368"/>
-            <a:ext cx="2695879" cy="841248"/>
-          </a:xfrm>
-          <a:prstGeom prst="chevron">
-            <a:avLst/>
-          </a:prstGeom>
-          <a:solidFill>
-            <a:srgbClr val="EEF3F8"/>
-          </a:solidFill>
-          <a:ln w="15875">
-            <a:solidFill>
-              <a:srgbClr val="CEDAE6"/>
-            </a:solidFill>
-          </a:ln>
-          <a:effectLst/>
-        </p:spPr>
-        <p:style>
-          <a:lnRef idx="1">
-            <a:schemeClr val="accent1"/>
-          </a:lnRef>
-          <a:fillRef idx="3">
-            <a:schemeClr val="accent1"/>
-          </a:fillRef>
-          <a:effectRef idx="2">
-            <a:schemeClr val="accent1"/>
-          </a:effectRef>
-          <a:fontRef idx="minor">
-            <a:schemeClr val="lt1"/>
-          </a:fontRef>
-        </p:style>
-        <p:txBody>
-          <a:bodyPr rtlCol="0" anchor="ctr" wrap="square" lIns="118872" rIns="118872"/>
-          <a:lstStyle/>
-          <a:p>
-            <a:pPr algn="ctr"/>
-            <a:r>
-              <a:rPr sz="1400" b="0" i="0">
-                <a:solidFill>
-                  <a:srgbClr val="101A28"/>
-                </a:solidFill>
-                <a:latin typeface="Segoe UI"/>
-              </a:rPr>
-              <a:t>engine</a:t>
-            </a:r>
-          </a:p>
-        </p:txBody>
-      </p:sp>
-      <p:sp>
-        <p:nvSpPr>
-          <p:cNvPr id="13" name="deck-pipe-1-3"/>
-          <p:cNvSpPr/>
-          <p:nvPr/>
-        </p:nvSpPr>
-        <p:spPr>
-          <a:xfrm>
-            <a:off x="8928887" y="3071368"/>
-            <a:ext cx="2695879" cy="841248"/>
+            <a:off x="9486351" y="2380996"/>
+            <a:ext cx="2138415" cy="841248"/>
           </a:xfrm>
           <a:prstGeom prst="chevron">
             <a:avLst/>
@@ -5755,21 +5737,357 @@
                 </a:solidFill>
                 <a:latin typeface="Segoe UI"/>
               </a:rPr>
-              <a:t>tamper-evident ledger</a:t>
-            </a:r>
-          </a:p>
-        </p:txBody>
-      </p:sp>
-      <p:sp>
-        <p:nvSpPr>
-          <p:cNvPr id="14" name="deck-points"/>
+              <a:t>FPR threshold, TreeSHAP, ledger</a:t>
+            </a:r>
+          </a:p>
+        </p:txBody>
+      </p:sp>
+      <p:sp>
+        <p:nvSpPr>
+          <p:cNvPr id="12" name="deck-lane-caption-evaluation"/>
           <p:cNvSpPr txBox="1"/>
           <p:nvPr/>
         </p:nvSpPr>
         <p:spPr>
           <a:xfrm>
-            <a:off x="566928" y="4168648"/>
-            <a:ext cx="11057839" cy="1799082"/>
+            <a:off x="566928" y="3405124"/>
+            <a:ext cx="11057839" cy="224028"/>
+          </a:xfrm>
+          <a:prstGeom prst="rect">
+            <a:avLst/>
+          </a:prstGeom>
+          <a:noFill/>
+        </p:spPr>
+        <p:txBody>
+          <a:bodyPr wrap="square" lIns="0" rIns="0" tIns="0" bIns="0">
+            <a:spAutoFit/>
+          </a:bodyPr>
+          <a:lstStyle/>
+          <a:p>
+            <a:pPr>
+              <a:spcAft>
+                <a:spcPts val="0"/>
+              </a:spcAft>
+            </a:pPr>
+            <a:r>
+              <a:rPr sz="1400" b="1" i="0">
+                <a:solidFill>
+                  <a:srgbClr val="556272"/>
+                </a:solidFill>
+                <a:latin typeface="Segoe UI"/>
+              </a:rPr>
+              <a:t>EVALUATION-ONLY — measured in </a:t>
+            </a:r>
+            <a:r>
+              <a:rPr sz="1400" b="1" i="0">
+                <a:solidFill>
+                  <a:srgbClr val="556272"/>
+                </a:solidFill>
+                <a:latin typeface="Consolas"/>
+              </a:rPr>
+              <a:t>eval/</a:t>
+            </a:r>
+            <a:r>
+              <a:rPr sz="1400" b="1" i="0">
+                <a:solidFill>
+                  <a:srgbClr val="556272"/>
+                </a:solidFill>
+                <a:latin typeface="Segoe UI"/>
+              </a:rPr>
+              <a:t>, never loaded by the engine</a:t>
+            </a:r>
+          </a:p>
+        </p:txBody>
+      </p:sp>
+      <p:sp>
+        <p:nvSpPr>
+          <p:cNvPr id="13" name="deck-lane-evaluation-0"/>
+          <p:cNvSpPr/>
+          <p:nvPr/>
+        </p:nvSpPr>
+        <p:spPr>
+          <a:xfrm>
+            <a:off x="566928" y="3684016"/>
+            <a:ext cx="2138415" cy="841248"/>
+          </a:xfrm>
+          <a:prstGeom prst="chevron">
+            <a:avLst/>
+          </a:prstGeom>
+          <a:noFill/>
+          <a:ln w="15875">
+            <a:solidFill>
+              <a:srgbClr val="556272"/>
+            </a:solidFill>
+            <a:prstDash val="dash"/>
+          </a:ln>
+          <a:effectLst/>
+        </p:spPr>
+        <p:style>
+          <a:lnRef idx="1">
+            <a:schemeClr val="accent1"/>
+          </a:lnRef>
+          <a:fillRef idx="3">
+            <a:schemeClr val="accent1"/>
+          </a:fillRef>
+          <a:effectRef idx="2">
+            <a:schemeClr val="accent1"/>
+          </a:effectRef>
+          <a:fontRef idx="minor">
+            <a:schemeClr val="lt1"/>
+          </a:fontRef>
+        </p:style>
+        <p:txBody>
+          <a:bodyPr rtlCol="0" anchor="ctr" wrap="square" lIns="118872" rIns="118872"/>
+          <a:lstStyle/>
+          <a:p>
+            <a:pPr algn="ctr"/>
+            <a:r>
+              <a:rPr sz="1400" b="0" i="0">
+                <a:solidFill>
+                  <a:srgbClr val="556272"/>
+                </a:solidFill>
+                <a:latin typeface="Segoe UI"/>
+              </a:rPr>
+              <a:t>same 30 features</a:t>
+            </a:r>
+          </a:p>
+        </p:txBody>
+      </p:sp>
+      <p:sp>
+        <p:nvSpPr>
+          <p:cNvPr id="14" name="deck-lane-evaluation-1"/>
+          <p:cNvSpPr/>
+          <p:nvPr/>
+        </p:nvSpPr>
+        <p:spPr>
+          <a:xfrm>
+            <a:off x="2796783" y="3684016"/>
+            <a:ext cx="2138415" cy="841248"/>
+          </a:xfrm>
+          <a:prstGeom prst="chevron">
+            <a:avLst/>
+          </a:prstGeom>
+          <a:noFill/>
+          <a:ln w="15875">
+            <a:solidFill>
+              <a:srgbClr val="556272"/>
+            </a:solidFill>
+            <a:prstDash val="dash"/>
+          </a:ln>
+          <a:effectLst/>
+        </p:spPr>
+        <p:style>
+          <a:lnRef idx="1">
+            <a:schemeClr val="accent1"/>
+          </a:lnRef>
+          <a:fillRef idx="3">
+            <a:schemeClr val="accent1"/>
+          </a:fillRef>
+          <a:effectRef idx="2">
+            <a:schemeClr val="accent1"/>
+          </a:effectRef>
+          <a:fontRef idx="minor">
+            <a:schemeClr val="lt1"/>
+          </a:fontRef>
+        </p:style>
+        <p:txBody>
+          <a:bodyPr rtlCol="0" anchor="ctr" wrap="square" lIns="118872" rIns="118872"/>
+          <a:lstStyle/>
+          <a:p>
+            <a:pPr algn="ctr"/>
+            <a:r>
+              <a:rPr sz="1400" b="0" i="0">
+                <a:solidFill>
+                  <a:srgbClr val="556272"/>
+                </a:solidFill>
+                <a:latin typeface="Segoe UI"/>
+              </a:rPr>
+              <a:t>TGN graph memory</a:t>
+            </a:r>
+          </a:p>
+        </p:txBody>
+      </p:sp>
+      <p:sp>
+        <p:nvSpPr>
+          <p:cNvPr id="15" name="deck-lane-evaluation-2"/>
+          <p:cNvSpPr/>
+          <p:nvPr/>
+        </p:nvSpPr>
+        <p:spPr>
+          <a:xfrm>
+            <a:off x="5026639" y="3684016"/>
+            <a:ext cx="2138415" cy="841248"/>
+          </a:xfrm>
+          <a:prstGeom prst="chevron">
+            <a:avLst/>
+          </a:prstGeom>
+          <a:noFill/>
+          <a:ln w="15875">
+            <a:solidFill>
+              <a:srgbClr val="556272"/>
+            </a:solidFill>
+            <a:prstDash val="dash"/>
+          </a:ln>
+          <a:effectLst/>
+        </p:spPr>
+        <p:style>
+          <a:lnRef idx="1">
+            <a:schemeClr val="accent1"/>
+          </a:lnRef>
+          <a:fillRef idx="3">
+            <a:schemeClr val="accent1"/>
+          </a:fillRef>
+          <a:effectRef idx="2">
+            <a:schemeClr val="accent1"/>
+          </a:effectRef>
+          <a:fontRef idx="minor">
+            <a:schemeClr val="lt1"/>
+          </a:fontRef>
+        </p:style>
+        <p:txBody>
+          <a:bodyPr rtlCol="0" anchor="ctr" wrap="square" lIns="118872" rIns="118872"/>
+          <a:lstStyle/>
+          <a:p>
+            <a:pPr algn="ctr"/>
+            <a:r>
+              <a:rPr sz="1400" b="0" i="0">
+                <a:solidFill>
+                  <a:srgbClr val="556272"/>
+                </a:solidFill>
+                <a:latin typeface="Segoe UI"/>
+              </a:rPr>
+              <a:t>GRAFT causal Transformer</a:t>
+            </a:r>
+          </a:p>
+        </p:txBody>
+      </p:sp>
+      <p:sp>
+        <p:nvSpPr>
+          <p:cNvPr id="16" name="deck-lane-evaluation-3"/>
+          <p:cNvSpPr/>
+          <p:nvPr/>
+        </p:nvSpPr>
+        <p:spPr>
+          <a:xfrm>
+            <a:off x="7256495" y="3684016"/>
+            <a:ext cx="2138415" cy="841248"/>
+          </a:xfrm>
+          <a:prstGeom prst="chevron">
+            <a:avLst/>
+          </a:prstGeom>
+          <a:noFill/>
+          <a:ln w="15875">
+            <a:solidFill>
+              <a:srgbClr val="556272"/>
+            </a:solidFill>
+            <a:prstDash val="dash"/>
+          </a:ln>
+          <a:effectLst/>
+        </p:spPr>
+        <p:style>
+          <a:lnRef idx="1">
+            <a:schemeClr val="accent1"/>
+          </a:lnRef>
+          <a:fillRef idx="3">
+            <a:schemeClr val="accent1"/>
+          </a:fillRef>
+          <a:effectRef idx="2">
+            <a:schemeClr val="accent1"/>
+          </a:effectRef>
+          <a:fontRef idx="minor">
+            <a:schemeClr val="lt1"/>
+          </a:fontRef>
+        </p:style>
+        <p:txBody>
+          <a:bodyPr rtlCol="0" anchor="ctr" wrap="square" lIns="118872" rIns="118872"/>
+          <a:lstStyle/>
+          <a:p>
+            <a:pPr algn="ctr"/>
+            <a:r>
+              <a:rPr sz="1400" b="0" i="0">
+                <a:solidFill>
+                  <a:srgbClr val="556272"/>
+                </a:solidFill>
+                <a:latin typeface="Segoe UI"/>
+              </a:rPr>
+              <a:t>k-step head — </a:t>
+            </a:r>
+            <a:r>
+              <a:rPr sz="1400" b="1" i="0">
+                <a:solidFill>
+                  <a:srgbClr val="556272"/>
+                </a:solidFill>
+                <a:latin typeface="Segoe UI"/>
+              </a:rPr>
+              <a:t>ranking only</a:t>
+            </a:r>
+          </a:p>
+        </p:txBody>
+      </p:sp>
+      <p:sp>
+        <p:nvSpPr>
+          <p:cNvPr id="17" name="deck-lane-evaluation-4"/>
+          <p:cNvSpPr/>
+          <p:nvPr/>
+        </p:nvSpPr>
+        <p:spPr>
+          <a:xfrm>
+            <a:off x="9486351" y="3684016"/>
+            <a:ext cx="2138415" cy="841248"/>
+          </a:xfrm>
+          <a:prstGeom prst="chevron">
+            <a:avLst/>
+          </a:prstGeom>
+          <a:noFill/>
+          <a:ln w="15875">
+            <a:solidFill>
+              <a:srgbClr val="556272"/>
+            </a:solidFill>
+            <a:prstDash val="dash"/>
+          </a:ln>
+          <a:effectLst/>
+        </p:spPr>
+        <p:style>
+          <a:lnRef idx="1">
+            <a:schemeClr val="accent1"/>
+          </a:lnRef>
+          <a:fillRef idx="3">
+            <a:schemeClr val="accent1"/>
+          </a:fillRef>
+          <a:effectRef idx="2">
+            <a:schemeClr val="accent1"/>
+          </a:effectRef>
+          <a:fontRef idx="minor">
+            <a:schemeClr val="lt1"/>
+          </a:fontRef>
+        </p:style>
+        <p:txBody>
+          <a:bodyPr rtlCol="0" anchor="ctr" wrap="square" lIns="118872" rIns="118872"/>
+          <a:lstStyle/>
+          <a:p>
+            <a:pPr algn="ctr"/>
+            <a:r>
+              <a:rPr sz="1400" b="0" i="0">
+                <a:solidFill>
+                  <a:srgbClr val="556272"/>
+                </a:solidFill>
+                <a:latin typeface="Segoe UI"/>
+              </a:rPr>
+              <a:t>rank-mean fusion</a:t>
+            </a:r>
+          </a:p>
+        </p:txBody>
+      </p:sp>
+      <p:sp>
+        <p:nvSpPr>
+          <p:cNvPr id="18" name="deck-points"/>
+          <p:cNvSpPr txBox="1"/>
+          <p:nvPr/>
+        </p:nvSpPr>
+        <p:spPr>
+          <a:xfrm>
+            <a:off x="566928" y="4708144"/>
+            <a:ext cx="11057839" cy="1255014"/>
           </a:xfrm>
           <a:prstGeom prst="rect">
             <a:avLst/>
@@ -5812,7 +6130,7 @@
                 </a:solidFill>
                 <a:latin typeface="Segoe UI"/>
               </a:rPr>
-              <a:t> — TTL variance, TCP window, fragment flags, payload histogram, scan signature, retransmissions — 110k packets/s in bounded memory</a:t>
+              <a:t> — TTL variance, TCP window, payload histogram, scan signature</a:t>
             </a:r>
           </a:p>
           <a:p>
@@ -5864,16 +6182,7 @@
                 </a:solidFill>
                 <a:latin typeface="Segoe UI"/>
               </a:rPr>
-              <a:t> proves perturbing the future leaves the past </a:t>
-            </a:r>
-            <a:r>
-              <a:rPr sz="1700" b="1" i="0">
-                <a:solidFill>
-                  <a:srgbClr val="101A28"/>
-                </a:solidFill>
-                <a:latin typeface="Segoe UI"/>
-              </a:rPr>
-              <a:t>bit-identical</a:t>
+              <a:t>: the future cannot change the past</a:t>
             </a:r>
           </a:p>
           <a:p>
@@ -5907,14 +6216,14 @@
                 </a:solidFill>
                 <a:latin typeface="Segoe UI"/>
               </a:rPr>
-              <a:t> — keyed-HMAC pseudonyms, per-epoch permutation, role-only node features</a:t>
-            </a:r>
-          </a:p>
-        </p:txBody>
-      </p:sp>
-      <p:sp>
-        <p:nvSpPr>
-          <p:cNvPr id="15" name="deck-footer"/>
+              <a:t> — keyed-HMAC pseudonyms, per-epoch permutation, no raw IP</a:t>
+            </a:r>
+          </a:p>
+        </p:txBody>
+      </p:sp>
+      <p:sp>
+        <p:nvSpPr>
+          <p:cNvPr id="19" name="deck-footer"/>
           <p:cNvSpPr txBox="1"/>
           <p:nvPr/>
         </p:nvSpPr>
@@ -5953,7 +6262,7 @@
       </p:sp>
       <p:sp>
         <p:nvSpPr>
-          <p:cNvPr id="16" name="deck-footer-number"/>
+          <p:cNvPr id="20" name="deck-footer-number"/>
           <p:cNvSpPr txBox="1"/>
           <p:nvPr/>
         </p:nvSpPr>
@@ -6211,10 +6520,10 @@
                 <a:tableStyleId>{5C22544A-7EE6-4342-B048-85BDC9FD1C3A}</a:tableStyleId>
               </a:tblPr>
               <a:tblGrid>
-                <a:gridCol w="4687519"/>
+                <a:gridCol w="5310327"/>
                 <a:gridCol w="868680"/>
                 <a:gridCol w="1828800"/>
-                <a:gridCol w="2636520"/>
+                <a:gridCol w="2013712"/>
                 <a:gridCol w="1036320"/>
               </a:tblGrid>
               <a:tr h="347472">
@@ -6230,7 +6539,7 @@
                           </a:solidFill>
                           <a:latin typeface="Segoe UI"/>
                         </a:rPr>
-                        <a:t>model</a:t>
+                        <a:t>model — where it runs</a:t>
                       </a:r>
                     </a:p>
                   </a:txBody>
@@ -6296,7 +6605,7 @@
                           </a:solidFill>
                           <a:latin typeface="Segoe UI"/>
                         </a:rPr>
-                        <a:t>median lead (horizon-0)</a:t>
+                        <a:t>lead (horizon-0)</a:t>
                       </a:r>
                     </a:p>
                   </a:txBody>
@@ -6336,13 +6645,115 @@
                     <a:lstStyle/>
                     <a:p>
                       <a:r>
+                        <a:rPr sz="1700" b="1" i="0">
+                          <a:solidFill>
+                            <a:srgbClr val="101A28"/>
+                          </a:solidFill>
+                          <a:latin typeface="Segoe UI"/>
+                        </a:rPr>
+                        <a:t>Fused TGN+XGBoost — EVAL-SIDE</a:t>
+                      </a:r>
+                    </a:p>
+                  </a:txBody>
+                  <a:tcPr anchor="ctr" marL="91440" marR="91440" marT="0" marB="0">
+                    <a:solidFill>
+                      <a:srgbClr val="FFFFFF"/>
+                    </a:solidFill>
+                  </a:tcPr>
+                </a:tc>
+                <a:tc>
+                  <a:txBody>
+                    <a:bodyPr/>
+                    <a:lstStyle/>
+                    <a:p>
+                      <a:r>
+                        <a:rPr sz="1700" b="1" i="0">
+                          <a:solidFill>
+                            <a:srgbClr val="101A28"/>
+                          </a:solidFill>
+                          <a:latin typeface="Segoe UI"/>
+                        </a:rPr>
+                        <a:t>0.933</a:t>
+                      </a:r>
+                    </a:p>
+                  </a:txBody>
+                  <a:tcPr anchor="ctr" marL="91440" marR="91440" marT="0" marB="0">
+                    <a:solidFill>
+                      <a:srgbClr val="FFFFFF"/>
+                    </a:solidFill>
+                  </a:tcPr>
+                </a:tc>
+                <a:tc>
+                  <a:txBody>
+                    <a:bodyPr/>
+                    <a:lstStyle/>
+                    <a:p/>
+                  </a:txBody>
+                  <a:tcPr anchor="ctr" marL="91440" marR="91440" marT="0" marB="0">
+                    <a:solidFill>
+                      <a:srgbClr val="FFFFFF"/>
+                    </a:solidFill>
+                  </a:tcPr>
+                </a:tc>
+                <a:tc>
+                  <a:txBody>
+                    <a:bodyPr/>
+                    <a:lstStyle/>
+                    <a:p>
+                      <a:r>
+                        <a:rPr sz="1700" b="0" i="0">
+                          <a:solidFill>
+                            <a:srgbClr val="101A28"/>
+                          </a:solidFill>
+                          <a:latin typeface="Segoe UI"/>
+                        </a:rPr>
+                        <a:t>4195 s (~70 min)</a:t>
+                      </a:r>
+                    </a:p>
+                  </a:txBody>
+                  <a:tcPr anchor="ctr" marL="91440" marR="91440" marT="0" marB="0">
+                    <a:solidFill>
+                      <a:srgbClr val="FFFFFF"/>
+                    </a:solidFill>
+                  </a:tcPr>
+                </a:tc>
+                <a:tc>
+                  <a:txBody>
+                    <a:bodyPr/>
+                    <a:lstStyle/>
+                    <a:p>
+                      <a:r>
+                        <a:rPr sz="1700" b="1" i="0">
+                          <a:solidFill>
+                            <a:srgbClr val="101A28"/>
+                          </a:solidFill>
+                          <a:latin typeface="Segoe UI"/>
+                        </a:rPr>
+                        <a:t>2/2</a:t>
+                      </a:r>
+                    </a:p>
+                  </a:txBody>
+                  <a:tcPr anchor="ctr" marL="91440" marR="91440" marT="0" marB="0">
+                    <a:solidFill>
+                      <a:srgbClr val="FFFFFF"/>
+                    </a:solidFill>
+                  </a:tcPr>
+                </a:tc>
+              </a:tr>
+              <a:tr h="402336">
+                <a:tc>
+                  <a:txBody>
+                    <a:bodyPr/>
+                    <a:lstStyle/>
+                    <a:p>
+                      <a:r>
                         <a:rPr sz="1800" b="1" i="0">
                           <a:solidFill>
                             <a:srgbClr val="101A28"/>
                           </a:solidFill>
                           <a:latin typeface="Segoe UI"/>
                         </a:rPr>
-                        <a:t>Fused (TGN + XGBoost, rank-mean)</a:t>
+                        <a:t>XGBoost — DEPLOYED ENGINE</a:t>
                       </a:r>
                     </a:p>
                   </a:txBody>
@@ -6358,13 +6769,13 @@
                     <a:lstStyle/>
                     <a:p>
                       <a:r>
-                        <a:rPr sz="1800" b="1" i="0">
+                        <a:rPr sz="1800" b="0" i="0">
                           <a:solidFill>
                             <a:srgbClr val="101A28"/>
                           </a:solidFill>
                           <a:latin typeface="Segoe UI"/>
                         </a:rPr>
-                        <a:t>0.933</a:t>
+                        <a:t>0.872</a:t>
                       </a:r>
                     </a:p>
                   </a:txBody>
@@ -6398,7 +6809,7 @@
                           </a:solidFill>
                           <a:latin typeface="Segoe UI"/>
                         </a:rPr>
-                        <a:t>4195 s (~70 min)</a:t>
+                        <a:t>4208 s</a:t>
                       </a:r>
                     </a:p>
                   </a:txBody>
@@ -6414,7 +6825,7 @@
                     <a:lstStyle/>
                     <a:p>
                       <a:r>
-                        <a:rPr sz="1800" b="1" i="0">
+                        <a:rPr sz="1800" b="0" i="0">
                           <a:solidFill>
                             <a:srgbClr val="101A28"/>
                           </a:solidFill>
@@ -6444,109 +6855,7 @@
                           </a:solidFill>
                           <a:latin typeface="Segoe UI"/>
                         </a:rPr>
-                        <a:t>XGBoost</a:t>
-                      </a:r>
-                    </a:p>
-                  </a:txBody>
-                  <a:tcPr anchor="ctr" marL="91440" marR="91440" marT="0" marB="0">
-                    <a:solidFill>
-                      <a:srgbClr val="FFFFFF"/>
-                    </a:solidFill>
-                  </a:tcPr>
-                </a:tc>
-                <a:tc>
-                  <a:txBody>
-                    <a:bodyPr/>
-                    <a:lstStyle/>
-                    <a:p>
-                      <a:r>
-                        <a:rPr sz="1700" b="0" i="0">
-                          <a:solidFill>
-                            <a:srgbClr val="101A28"/>
-                          </a:solidFill>
-                          <a:latin typeface="Segoe UI"/>
-                        </a:rPr>
-                        <a:t>0.872</a:t>
-                      </a:r>
-                    </a:p>
-                  </a:txBody>
-                  <a:tcPr anchor="ctr" marL="91440" marR="91440" marT="0" marB="0">
-                    <a:solidFill>
-                      <a:srgbClr val="FFFFFF"/>
-                    </a:solidFill>
-                  </a:tcPr>
-                </a:tc>
-                <a:tc>
-                  <a:txBody>
-                    <a:bodyPr/>
-                    <a:lstStyle/>
-                    <a:p/>
-                  </a:txBody>
-                  <a:tcPr anchor="ctr" marL="91440" marR="91440" marT="0" marB="0">
-                    <a:solidFill>
-                      <a:srgbClr val="FFFFFF"/>
-                    </a:solidFill>
-                  </a:tcPr>
-                </a:tc>
-                <a:tc>
-                  <a:txBody>
-                    <a:bodyPr/>
-                    <a:lstStyle/>
-                    <a:p>
-                      <a:r>
-                        <a:rPr sz="1700" b="0" i="0">
-                          <a:solidFill>
-                            <a:srgbClr val="101A28"/>
-                          </a:solidFill>
-                          <a:latin typeface="Segoe UI"/>
-                        </a:rPr>
-                        <a:t>4208 s</a:t>
-                      </a:r>
-                    </a:p>
-                  </a:txBody>
-                  <a:tcPr anchor="ctr" marL="91440" marR="91440" marT="0" marB="0">
-                    <a:solidFill>
-                      <a:srgbClr val="FFFFFF"/>
-                    </a:solidFill>
-                  </a:tcPr>
-                </a:tc>
-                <a:tc>
-                  <a:txBody>
-                    <a:bodyPr/>
-                    <a:lstStyle/>
-                    <a:p>
-                      <a:r>
-                        <a:rPr sz="1700" b="0" i="0">
-                          <a:solidFill>
-                            <a:srgbClr val="101A28"/>
-                          </a:solidFill>
-                          <a:latin typeface="Segoe UI"/>
-                        </a:rPr>
-                        <a:t>2/2</a:t>
-                      </a:r>
-                    </a:p>
-                  </a:txBody>
-                  <a:tcPr anchor="ctr" marL="91440" marR="91440" marT="0" marB="0">
-                    <a:solidFill>
-                      <a:srgbClr val="FFFFFF"/>
-                    </a:solidFill>
-                  </a:tcPr>
-                </a:tc>
-              </a:tr>
-              <a:tr h="402336">
-                <a:tc>
-                  <a:txBody>
-                    <a:bodyPr/>
-                    <a:lstStyle/>
-                    <a:p>
-                      <a:r>
-                        <a:rPr sz="1700" b="0" i="0">
-                          <a:solidFill>
-                            <a:srgbClr val="101A28"/>
-                          </a:solidFill>
-                          <a:latin typeface="Segoe UI"/>
-                        </a:rPr>
-                        <a:t>TGN temporal encoder</a:t>
+                        <a:t>TGN encoder — eval-side</a:t>
                       </a:r>
                     </a:p>
                   </a:txBody>
@@ -6648,7 +6957,7 @@
                           </a:solidFill>
                           <a:latin typeface="Segoe UI"/>
                         </a:rPr>
-                        <a:t>GRAFT (shipped config)</a:t>
+                        <a:t>GRAFT — eval-side</a:t>
                       </a:r>
                     </a:p>
                   </a:txBody>
@@ -6750,7 +7059,7 @@
                           </a:solidFill>
                           <a:latin typeface="Segoe UI"/>
                         </a:rPr>
-                        <a:t>Logistic regression </a:t>
+                        <a:t>LR </a:t>
                       </a:r>
                       <a:r>
                         <a:rPr sz="1700" b="0" i="1">
@@ -6760,6 +7069,15 @@
                           <a:latin typeface="Segoe UI"/>
                         </a:rPr>
                         <a:t>(graded baseline)</a:t>
+                      </a:r>
+                      <a:r>
+                        <a:rPr sz="1700" b="0" i="0">
+                          <a:solidFill>
+                            <a:srgbClr val="101A28"/>
+                          </a:solidFill>
+                          <a:latin typeface="Segoe UI"/>
+                        </a:rPr>
+                        <a:t> — eval-side</a:t>
                       </a:r>
                     </a:p>
                   </a:txBody>
@@ -6860,7 +7178,7 @@
         </p:nvSpPr>
         <p:spPr>
           <a:xfrm>
-            <a:off x="6214567" y="2037461"/>
+            <a:off x="6837375" y="2037461"/>
             <a:ext cx="1645920" cy="155448"/>
           </a:xfrm>
           <a:prstGeom prst="rect">
@@ -6902,8 +7220,92 @@
         </p:nvSpPr>
         <p:spPr>
           <a:xfrm>
-            <a:off x="6214567" y="2037461"/>
+            <a:off x="6837375" y="2037461"/>
             <a:ext cx="1535643" cy="155448"/>
+          </a:xfrm>
+          <a:prstGeom prst="rect">
+            <a:avLst/>
+          </a:prstGeom>
+          <a:solidFill>
+            <a:srgbClr val="9CC4E4"/>
+          </a:solidFill>
+          <a:ln>
+            <a:noFill/>
+          </a:ln>
+          <a:effectLst/>
+        </p:spPr>
+        <p:style>
+          <a:lnRef idx="1">
+            <a:schemeClr val="accent1"/>
+          </a:lnRef>
+          <a:fillRef idx="3">
+            <a:schemeClr val="accent1"/>
+          </a:fillRef>
+          <a:effectRef idx="2">
+            <a:schemeClr val="accent1"/>
+          </a:effectRef>
+          <a:fontRef idx="minor">
+            <a:schemeClr val="lt1"/>
+          </a:fontRef>
+        </p:style>
+        <p:txBody>
+          <a:bodyPr rtlCol="0" anchor="ctr"/>
+          <a:lstStyle/>
+          <a:p/>
+        </p:txBody>
+      </p:sp>
+      <p:sp>
+        <p:nvSpPr>
+          <p:cNvPr id="9" name="deck-bar-track-2"/>
+          <p:cNvSpPr/>
+          <p:nvPr/>
+        </p:nvSpPr>
+        <p:spPr>
+          <a:xfrm>
+            <a:off x="6837375" y="2439797"/>
+            <a:ext cx="1645920" cy="155448"/>
+          </a:xfrm>
+          <a:prstGeom prst="rect">
+            <a:avLst/>
+          </a:prstGeom>
+          <a:solidFill>
+            <a:srgbClr val="E6ECF2"/>
+          </a:solidFill>
+          <a:ln>
+            <a:noFill/>
+          </a:ln>
+          <a:effectLst/>
+        </p:spPr>
+        <p:style>
+          <a:lnRef idx="1">
+            <a:schemeClr val="accent1"/>
+          </a:lnRef>
+          <a:fillRef idx="3">
+            <a:schemeClr val="accent1"/>
+          </a:fillRef>
+          <a:effectRef idx="2">
+            <a:schemeClr val="accent1"/>
+          </a:effectRef>
+          <a:fontRef idx="minor">
+            <a:schemeClr val="lt1"/>
+          </a:fontRef>
+        </p:style>
+        <p:txBody>
+          <a:bodyPr rtlCol="0" anchor="ctr"/>
+          <a:lstStyle/>
+          <a:p/>
+        </p:txBody>
+      </p:sp>
+      <p:sp>
+        <p:nvSpPr>
+          <p:cNvPr id="10" name="deck-bar-2"/>
+          <p:cNvSpPr/>
+          <p:nvPr/>
+        </p:nvSpPr>
+        <p:spPr>
+          <a:xfrm>
+            <a:off x="6837375" y="2439797"/>
+            <a:ext cx="1435242" cy="155448"/>
           </a:xfrm>
           <a:prstGeom prst="rect">
             <a:avLst/>
@@ -6938,13 +7340,13 @@
       </p:sp>
       <p:sp>
         <p:nvSpPr>
-          <p:cNvPr id="9" name="deck-bar-track-2"/>
+          <p:cNvPr id="11" name="deck-bar-track-3"/>
           <p:cNvSpPr/>
           <p:nvPr/>
         </p:nvSpPr>
         <p:spPr>
           <a:xfrm>
-            <a:off x="6214567" y="2439797"/>
+            <a:off x="6837375" y="2842133"/>
             <a:ext cx="1645920" cy="155448"/>
           </a:xfrm>
           <a:prstGeom prst="rect">
@@ -6980,14 +7382,14 @@
       </p:sp>
       <p:sp>
         <p:nvSpPr>
-          <p:cNvPr id="10" name="deck-bar-2"/>
+          <p:cNvPr id="12" name="deck-bar-3"/>
           <p:cNvSpPr/>
           <p:nvPr/>
         </p:nvSpPr>
         <p:spPr>
           <a:xfrm>
-            <a:off x="6214567" y="2439797"/>
-            <a:ext cx="1435242" cy="155448"/>
+            <a:off x="6837375" y="2842133"/>
+            <a:ext cx="1382572" cy="155448"/>
           </a:xfrm>
           <a:prstGeom prst="rect">
             <a:avLst/>
@@ -7022,13 +7424,13 @@
       </p:sp>
       <p:sp>
         <p:nvSpPr>
-          <p:cNvPr id="11" name="deck-bar-track-3"/>
+          <p:cNvPr id="13" name="deck-bar-track-4"/>
           <p:cNvSpPr/>
           <p:nvPr/>
         </p:nvSpPr>
         <p:spPr>
           <a:xfrm>
-            <a:off x="6214567" y="2842133"/>
+            <a:off x="6837375" y="3244469"/>
             <a:ext cx="1645920" cy="155448"/>
           </a:xfrm>
           <a:prstGeom prst="rect">
@@ -7064,14 +7466,14 @@
       </p:sp>
       <p:sp>
         <p:nvSpPr>
-          <p:cNvPr id="12" name="deck-bar-3"/>
+          <p:cNvPr id="14" name="deck-bar-4"/>
           <p:cNvSpPr/>
           <p:nvPr/>
         </p:nvSpPr>
         <p:spPr>
           <a:xfrm>
-            <a:off x="6214567" y="2842133"/>
-            <a:ext cx="1382572" cy="155448"/>
+            <a:off x="6837375" y="3244469"/>
+            <a:ext cx="1153789" cy="155448"/>
           </a:xfrm>
           <a:prstGeom prst="rect">
             <a:avLst/>
@@ -7106,13 +7508,13 @@
       </p:sp>
       <p:sp>
         <p:nvSpPr>
-          <p:cNvPr id="13" name="deck-bar-track-4"/>
+          <p:cNvPr id="15" name="deck-bar-track-5"/>
           <p:cNvSpPr/>
           <p:nvPr/>
         </p:nvSpPr>
         <p:spPr>
           <a:xfrm>
-            <a:off x="6214567" y="3244469"/>
+            <a:off x="6837375" y="3646804"/>
             <a:ext cx="1645920" cy="155448"/>
           </a:xfrm>
           <a:prstGeom prst="rect">
@@ -7148,97 +7550,13 @@
       </p:sp>
       <p:sp>
         <p:nvSpPr>
-          <p:cNvPr id="14" name="deck-bar-4"/>
-          <p:cNvSpPr/>
-          <p:nvPr/>
-        </p:nvSpPr>
-        <p:spPr>
-          <a:xfrm>
-            <a:off x="6214567" y="3244469"/>
-            <a:ext cx="1153789" cy="155448"/>
-          </a:xfrm>
-          <a:prstGeom prst="rect">
-            <a:avLst/>
-          </a:prstGeom>
-          <a:solidFill>
-            <a:srgbClr val="9CC4E4"/>
-          </a:solidFill>
-          <a:ln>
-            <a:noFill/>
-          </a:ln>
-          <a:effectLst/>
-        </p:spPr>
-        <p:style>
-          <a:lnRef idx="1">
-            <a:schemeClr val="accent1"/>
-          </a:lnRef>
-          <a:fillRef idx="3">
-            <a:schemeClr val="accent1"/>
-          </a:fillRef>
-          <a:effectRef idx="2">
-            <a:schemeClr val="accent1"/>
-          </a:effectRef>
-          <a:fontRef idx="minor">
-            <a:schemeClr val="lt1"/>
-          </a:fontRef>
-        </p:style>
-        <p:txBody>
-          <a:bodyPr rtlCol="0" anchor="ctr"/>
-          <a:lstStyle/>
-          <a:p/>
-        </p:txBody>
-      </p:sp>
-      <p:sp>
-        <p:nvSpPr>
-          <p:cNvPr id="15" name="deck-bar-track-5"/>
-          <p:cNvSpPr/>
-          <p:nvPr/>
-        </p:nvSpPr>
-        <p:spPr>
-          <a:xfrm>
-            <a:off x="6214567" y="3646804"/>
-            <a:ext cx="1645920" cy="155448"/>
-          </a:xfrm>
-          <a:prstGeom prst="rect">
-            <a:avLst/>
-          </a:prstGeom>
-          <a:solidFill>
-            <a:srgbClr val="E6ECF2"/>
-          </a:solidFill>
-          <a:ln>
-            <a:noFill/>
-          </a:ln>
-          <a:effectLst/>
-        </p:spPr>
-        <p:style>
-          <a:lnRef idx="1">
-            <a:schemeClr val="accent1"/>
-          </a:lnRef>
-          <a:fillRef idx="3">
-            <a:schemeClr val="accent1"/>
-          </a:fillRef>
-          <a:effectRef idx="2">
-            <a:schemeClr val="accent1"/>
-          </a:effectRef>
-          <a:fontRef idx="minor">
-            <a:schemeClr val="lt1"/>
-          </a:fontRef>
-        </p:style>
-        <p:txBody>
-          <a:bodyPr rtlCol="0" anchor="ctr"/>
-          <a:lstStyle/>
-          <a:p/>
-        </p:txBody>
-      </p:sp>
-      <p:sp>
-        <p:nvSpPr>
           <p:cNvPr id="16" name="deck-bar-5"/>
           <p:cNvSpPr/>
           <p:nvPr/>
         </p:nvSpPr>
         <p:spPr>
           <a:xfrm>
-            <a:off x="6214567" y="3646804"/>
+            <a:off x="6837375" y="3646804"/>
             <a:ext cx="943112" cy="155448"/>
           </a:xfrm>
           <a:prstGeom prst="rect">
